--- a/Give Us Clean Hands.pptx
+++ b/Give Us Clean Hands.pptx
@@ -253,7 +253,7 @@
           <a:p>
             <a:fld id="{E759A0DE-F190-5444-87AC-4719D5F20D15}" type="datetimeFigureOut">
               <a:rPr lang="en-US" smtClean="0"/>
-              <a:t>7/18/26</a:t>
+              <a:t>10/1/26</a:t>
             </a:fld>
             <a:endParaRPr lang="en-US"/>
           </a:p>
@@ -423,7 +423,7 @@
           <a:p>
             <a:fld id="{E759A0DE-F190-5444-87AC-4719D5F20D15}" type="datetimeFigureOut">
               <a:rPr lang="en-US" smtClean="0"/>
-              <a:t>7/18/26</a:t>
+              <a:t>10/1/26</a:t>
             </a:fld>
             <a:endParaRPr lang="en-US"/>
           </a:p>
@@ -603,7 +603,7 @@
           <a:p>
             <a:fld id="{E759A0DE-F190-5444-87AC-4719D5F20D15}" type="datetimeFigureOut">
               <a:rPr lang="en-US" smtClean="0"/>
-              <a:t>7/18/26</a:t>
+              <a:t>10/1/26</a:t>
             </a:fld>
             <a:endParaRPr lang="en-US"/>
           </a:p>
@@ -773,7 +773,7 @@
           <a:p>
             <a:fld id="{E759A0DE-F190-5444-87AC-4719D5F20D15}" type="datetimeFigureOut">
               <a:rPr lang="en-US" smtClean="0"/>
-              <a:t>7/18/26</a:t>
+              <a:t>10/1/26</a:t>
             </a:fld>
             <a:endParaRPr lang="en-US"/>
           </a:p>
@@ -1019,7 +1019,7 @@
           <a:p>
             <a:fld id="{E759A0DE-F190-5444-87AC-4719D5F20D15}" type="datetimeFigureOut">
               <a:rPr lang="en-US" smtClean="0"/>
-              <a:t>7/18/26</a:t>
+              <a:t>10/1/26</a:t>
             </a:fld>
             <a:endParaRPr lang="en-US"/>
           </a:p>
@@ -1251,7 +1251,7 @@
           <a:p>
             <a:fld id="{E759A0DE-F190-5444-87AC-4719D5F20D15}" type="datetimeFigureOut">
               <a:rPr lang="en-US" smtClean="0"/>
-              <a:t>7/18/26</a:t>
+              <a:t>10/1/26</a:t>
             </a:fld>
             <a:endParaRPr lang="en-US"/>
           </a:p>
@@ -1618,7 +1618,7 @@
           <a:p>
             <a:fld id="{E759A0DE-F190-5444-87AC-4719D5F20D15}" type="datetimeFigureOut">
               <a:rPr lang="en-US" smtClean="0"/>
-              <a:t>7/18/26</a:t>
+              <a:t>10/1/26</a:t>
             </a:fld>
             <a:endParaRPr lang="en-US"/>
           </a:p>
@@ -1736,7 +1736,7 @@
           <a:p>
             <a:fld id="{E759A0DE-F190-5444-87AC-4719D5F20D15}" type="datetimeFigureOut">
               <a:rPr lang="en-US" smtClean="0"/>
-              <a:t>7/18/26</a:t>
+              <a:t>10/1/26</a:t>
             </a:fld>
             <a:endParaRPr lang="en-US"/>
           </a:p>
@@ -1831,7 +1831,7 @@
           <a:p>
             <a:fld id="{E759A0DE-F190-5444-87AC-4719D5F20D15}" type="datetimeFigureOut">
               <a:rPr lang="en-US" smtClean="0"/>
-              <a:t>7/18/26</a:t>
+              <a:t>10/1/26</a:t>
             </a:fld>
             <a:endParaRPr lang="en-US"/>
           </a:p>
@@ -2108,7 +2108,7 @@
           <a:p>
             <a:fld id="{E759A0DE-F190-5444-87AC-4719D5F20D15}" type="datetimeFigureOut">
               <a:rPr lang="en-US" smtClean="0"/>
-              <a:t>7/18/26</a:t>
+              <a:t>10/1/26</a:t>
             </a:fld>
             <a:endParaRPr lang="en-US"/>
           </a:p>
@@ -2365,7 +2365,7 @@
           <a:p>
             <a:fld id="{E759A0DE-F190-5444-87AC-4719D5F20D15}" type="datetimeFigureOut">
               <a:rPr lang="en-US" smtClean="0"/>
-              <a:t>7/18/26</a:t>
+              <a:t>10/1/26</a:t>
             </a:fld>
             <a:endParaRPr lang="en-US"/>
           </a:p>
@@ -2578,7 +2578,7 @@
           <a:p>
             <a:fld id="{E759A0DE-F190-5444-87AC-4719D5F20D15}" type="datetimeFigureOut">
               <a:rPr lang="en-US" smtClean="0"/>
-              <a:t>7/18/26</a:t>
+              <a:t>10/1/26</a:t>
             </a:fld>
             <a:endParaRPr lang="en-US"/>
           </a:p>
@@ -3397,15 +3397,34 @@
             </a:r>
           </a:p>
           <a:p>
-            <a:r>
-              <a:rPr lang="en-US" sz="5400" dirty="0">
+            <a:endParaRPr lang="en-US" sz="5400">
+              <a:solidFill>
+                <a:schemeClr val="bg1"/>
+              </a:solidFill>
+              <a:latin typeface="Avenir Medium" panose="02000503020000020003" pitchFamily="2" charset="0"/>
+              <a:ea typeface="Bodoni Ornaments" pitchFamily="2" charset="0"/>
+            </a:endParaRPr>
+          </a:p>
+          <a:p>
+            <a:r>
+              <a:rPr lang="en-US" sz="5400">
                 <a:solidFill>
                   <a:schemeClr val="bg1"/>
                 </a:solidFill>
                 <a:latin typeface="Avenir Medium" panose="02000503020000020003" pitchFamily="2" charset="0"/>
                 <a:ea typeface="Bodoni Ornaments" pitchFamily="2" charset="0"/>
               </a:rPr>
-              <a:t>That seeks Your face</a:t>
+              <a:t>That </a:t>
+            </a:r>
+            <a:r>
+              <a:rPr lang="en-US" sz="5400" dirty="0">
+                <a:solidFill>
+                  <a:schemeClr val="bg1"/>
+                </a:solidFill>
+                <a:latin typeface="Avenir Medium" panose="02000503020000020003" pitchFamily="2" charset="0"/>
+                <a:ea typeface="Bodoni Ornaments" pitchFamily="2" charset="0"/>
+              </a:rPr>
+              <a:t>seeks Your face</a:t>
             </a:r>
           </a:p>
           <a:p>
@@ -3512,6 +3531,30 @@
             </a:endParaRPr>
           </a:p>
           <a:p>
+            <a:r>
+              <a:rPr lang="en-US" sz="5400" dirty="0">
+                <a:solidFill>
+                  <a:schemeClr val="bg1"/>
+                </a:solidFill>
+                <a:latin typeface="Avenir Medium" panose="02000503020000020003" pitchFamily="2" charset="0"/>
+                <a:ea typeface="Bodoni Ornaments" pitchFamily="2" charset="0"/>
+              </a:rPr>
+              <a:t>We bow our hearts, </a:t>
+            </a:r>
+          </a:p>
+          <a:p>
+            <a:r>
+              <a:rPr lang="en-US" sz="5400" dirty="0">
+                <a:solidFill>
+                  <a:schemeClr val="bg1"/>
+                </a:solidFill>
+                <a:latin typeface="Avenir Medium" panose="02000503020000020003" pitchFamily="2" charset="0"/>
+                <a:ea typeface="Bodoni Ornaments" pitchFamily="2" charset="0"/>
+              </a:rPr>
+              <a:t>we bend our knees</a:t>
+            </a:r>
+          </a:p>
+          <a:p>
             <a:endParaRPr lang="en-US" sz="5400" dirty="0">
               <a:solidFill>
                 <a:schemeClr val="bg1"/>
@@ -3519,30 +3562,6 @@
               <a:latin typeface="Avenir Medium" panose="02000503020000020003" pitchFamily="2" charset="0"/>
               <a:ea typeface="Bodoni Ornaments" pitchFamily="2" charset="0"/>
             </a:endParaRPr>
-          </a:p>
-          <a:p>
-            <a:r>
-              <a:rPr lang="en-US" sz="5400" dirty="0">
-                <a:solidFill>
-                  <a:schemeClr val="bg1"/>
-                </a:solidFill>
-                <a:latin typeface="Avenir Medium" panose="02000503020000020003" pitchFamily="2" charset="0"/>
-                <a:ea typeface="Bodoni Ornaments" pitchFamily="2" charset="0"/>
-              </a:rPr>
-              <a:t>We bow our hearts, </a:t>
-            </a:r>
-          </a:p>
-          <a:p>
-            <a:r>
-              <a:rPr lang="en-US" sz="5400" dirty="0">
-                <a:solidFill>
-                  <a:schemeClr val="bg1"/>
-                </a:solidFill>
-                <a:latin typeface="Avenir Medium" panose="02000503020000020003" pitchFamily="2" charset="0"/>
-                <a:ea typeface="Bodoni Ornaments" pitchFamily="2" charset="0"/>
-              </a:rPr>
-              <a:t>we bend our knees</a:t>
-            </a:r>
           </a:p>
           <a:p>
             <a:r>
@@ -3660,6 +3679,15 @@
             </a:r>
           </a:p>
           <a:p>
+            <a:endParaRPr lang="en-US" sz="5400" dirty="0">
+              <a:solidFill>
+                <a:schemeClr val="bg1"/>
+              </a:solidFill>
+              <a:latin typeface="Avenir Medium" panose="02000503020000020003" pitchFamily="2" charset="0"/>
+              <a:ea typeface="Bodoni Ornaments" pitchFamily="2" charset="0"/>
+            </a:endParaRPr>
+          </a:p>
+          <a:p>
             <a:r>
               <a:rPr lang="en-US" sz="5400" dirty="0">
                 <a:solidFill>
@@ -3935,6 +3963,15 @@
             </a:r>
           </a:p>
           <a:p>
+            <a:endParaRPr lang="en-US" sz="5400" dirty="0">
+              <a:solidFill>
+                <a:schemeClr val="bg1"/>
+              </a:solidFill>
+              <a:latin typeface="Avenir Medium" panose="02000503020000020003" pitchFamily="2" charset="0"/>
+              <a:ea typeface="Bodoni Ornaments" pitchFamily="2" charset="0"/>
+            </a:endParaRPr>
+          </a:p>
+          <a:p>
             <a:r>
               <a:rPr lang="en-US" sz="5400" dirty="0">
                 <a:solidFill>
@@ -4050,6 +4087,30 @@
             </a:endParaRPr>
           </a:p>
           <a:p>
+            <a:r>
+              <a:rPr lang="en-US" sz="5400" dirty="0">
+                <a:solidFill>
+                  <a:schemeClr val="bg1"/>
+                </a:solidFill>
+                <a:latin typeface="Avenir Medium" panose="02000503020000020003" pitchFamily="2" charset="0"/>
+                <a:ea typeface="Bodoni Ornaments" pitchFamily="2" charset="0"/>
+              </a:rPr>
+              <a:t>We bow our hearts, </a:t>
+            </a:r>
+          </a:p>
+          <a:p>
+            <a:r>
+              <a:rPr lang="en-US" sz="5400" dirty="0">
+                <a:solidFill>
+                  <a:schemeClr val="bg1"/>
+                </a:solidFill>
+                <a:latin typeface="Avenir Medium" panose="02000503020000020003" pitchFamily="2" charset="0"/>
+                <a:ea typeface="Bodoni Ornaments" pitchFamily="2" charset="0"/>
+              </a:rPr>
+              <a:t>we bend our knees</a:t>
+            </a:r>
+          </a:p>
+          <a:p>
             <a:endParaRPr lang="en-US" sz="5400" dirty="0">
               <a:solidFill>
                 <a:schemeClr val="bg1"/>
@@ -4057,30 +4118,6 @@
               <a:latin typeface="Avenir Medium" panose="02000503020000020003" pitchFamily="2" charset="0"/>
               <a:ea typeface="Bodoni Ornaments" pitchFamily="2" charset="0"/>
             </a:endParaRPr>
-          </a:p>
-          <a:p>
-            <a:r>
-              <a:rPr lang="en-US" sz="5400" dirty="0">
-                <a:solidFill>
-                  <a:schemeClr val="bg1"/>
-                </a:solidFill>
-                <a:latin typeface="Avenir Medium" panose="02000503020000020003" pitchFamily="2" charset="0"/>
-                <a:ea typeface="Bodoni Ornaments" pitchFamily="2" charset="0"/>
-              </a:rPr>
-              <a:t>We bow our hearts, </a:t>
-            </a:r>
-          </a:p>
-          <a:p>
-            <a:r>
-              <a:rPr lang="en-US" sz="5400" dirty="0">
-                <a:solidFill>
-                  <a:schemeClr val="bg1"/>
-                </a:solidFill>
-                <a:latin typeface="Avenir Medium" panose="02000503020000020003" pitchFamily="2" charset="0"/>
-                <a:ea typeface="Bodoni Ornaments" pitchFamily="2" charset="0"/>
-              </a:rPr>
-              <a:t>we bend our knees</a:t>
-            </a:r>
           </a:p>
           <a:p>
             <a:r>
@@ -4198,6 +4235,15 @@
             </a:r>
           </a:p>
           <a:p>
+            <a:endParaRPr lang="en-US" sz="5400" dirty="0">
+              <a:solidFill>
+                <a:schemeClr val="bg1"/>
+              </a:solidFill>
+              <a:latin typeface="Avenir Medium" panose="02000503020000020003" pitchFamily="2" charset="0"/>
+              <a:ea typeface="Bodoni Ornaments" pitchFamily="2" charset="0"/>
+            </a:endParaRPr>
+          </a:p>
+          <a:p>
             <a:r>
               <a:rPr lang="en-US" sz="5400" dirty="0">
                 <a:solidFill>
@@ -4471,6 +4517,15 @@
               </a:rPr>
               <a:t>A generation that seeks</a:t>
             </a:r>
+          </a:p>
+          <a:p>
+            <a:endParaRPr lang="en-US" sz="5400" dirty="0">
+              <a:solidFill>
+                <a:schemeClr val="bg1"/>
+              </a:solidFill>
+              <a:latin typeface="Avenir Medium" panose="02000503020000020003" pitchFamily="2" charset="0"/>
+              <a:ea typeface="Bodoni Ornaments" pitchFamily="2" charset="0"/>
+            </a:endParaRPr>
           </a:p>
           <a:p>
             <a:r>
